--- a/RawImages/imagePPT.pptx
+++ b/RawImages/imagePPT.pptx
@@ -10,6 +10,7 @@
     <p:sldId id="258" r:id="rId4"/>
     <p:sldId id="259" r:id="rId5"/>
     <p:sldId id="260" r:id="rId6"/>
+    <p:sldId id="261" r:id="rId7"/>
   </p:sldIdLst>
   <p:sldSz cx="12192000" cy="6858000"/>
   <p:notesSz cx="6858000" cy="9144000"/>
@@ -263,7 +264,7 @@
           <a:p>
             <a:fld id="{F3E3B444-461C-43DF-9895-EF8F91AA3F26}" type="datetimeFigureOut">
               <a:rPr lang="ko-KR" altLang="en-US" smtClean="0"/>
-              <a:t>2025-05-24</a:t>
+              <a:t>2025-05-26</a:t>
             </a:fld>
             <a:endParaRPr lang="ko-KR" altLang="en-US"/>
           </a:p>
@@ -461,7 +462,7 @@
           <a:p>
             <a:fld id="{F3E3B444-461C-43DF-9895-EF8F91AA3F26}" type="datetimeFigureOut">
               <a:rPr lang="ko-KR" altLang="en-US" smtClean="0"/>
-              <a:t>2025-05-24</a:t>
+              <a:t>2025-05-26</a:t>
             </a:fld>
             <a:endParaRPr lang="ko-KR" altLang="en-US"/>
           </a:p>
@@ -669,7 +670,7 @@
           <a:p>
             <a:fld id="{F3E3B444-461C-43DF-9895-EF8F91AA3F26}" type="datetimeFigureOut">
               <a:rPr lang="ko-KR" altLang="en-US" smtClean="0"/>
-              <a:t>2025-05-24</a:t>
+              <a:t>2025-05-26</a:t>
             </a:fld>
             <a:endParaRPr lang="ko-KR" altLang="en-US"/>
           </a:p>
@@ -867,7 +868,7 @@
           <a:p>
             <a:fld id="{F3E3B444-461C-43DF-9895-EF8F91AA3F26}" type="datetimeFigureOut">
               <a:rPr lang="ko-KR" altLang="en-US" smtClean="0"/>
-              <a:t>2025-05-24</a:t>
+              <a:t>2025-05-26</a:t>
             </a:fld>
             <a:endParaRPr lang="ko-KR" altLang="en-US"/>
           </a:p>
@@ -1142,7 +1143,7 @@
           <a:p>
             <a:fld id="{F3E3B444-461C-43DF-9895-EF8F91AA3F26}" type="datetimeFigureOut">
               <a:rPr lang="ko-KR" altLang="en-US" smtClean="0"/>
-              <a:t>2025-05-24</a:t>
+              <a:t>2025-05-26</a:t>
             </a:fld>
             <a:endParaRPr lang="ko-KR" altLang="en-US"/>
           </a:p>
@@ -1407,7 +1408,7 @@
           <a:p>
             <a:fld id="{F3E3B444-461C-43DF-9895-EF8F91AA3F26}" type="datetimeFigureOut">
               <a:rPr lang="ko-KR" altLang="en-US" smtClean="0"/>
-              <a:t>2025-05-24</a:t>
+              <a:t>2025-05-26</a:t>
             </a:fld>
             <a:endParaRPr lang="ko-KR" altLang="en-US"/>
           </a:p>
@@ -1819,7 +1820,7 @@
           <a:p>
             <a:fld id="{F3E3B444-461C-43DF-9895-EF8F91AA3F26}" type="datetimeFigureOut">
               <a:rPr lang="ko-KR" altLang="en-US" smtClean="0"/>
-              <a:t>2025-05-24</a:t>
+              <a:t>2025-05-26</a:t>
             </a:fld>
             <a:endParaRPr lang="ko-KR" altLang="en-US"/>
           </a:p>
@@ -1960,7 +1961,7 @@
           <a:p>
             <a:fld id="{F3E3B444-461C-43DF-9895-EF8F91AA3F26}" type="datetimeFigureOut">
               <a:rPr lang="ko-KR" altLang="en-US" smtClean="0"/>
-              <a:t>2025-05-24</a:t>
+              <a:t>2025-05-26</a:t>
             </a:fld>
             <a:endParaRPr lang="ko-KR" altLang="en-US"/>
           </a:p>
@@ -2073,7 +2074,7 @@
           <a:p>
             <a:fld id="{F3E3B444-461C-43DF-9895-EF8F91AA3F26}" type="datetimeFigureOut">
               <a:rPr lang="ko-KR" altLang="en-US" smtClean="0"/>
-              <a:t>2025-05-24</a:t>
+              <a:t>2025-05-26</a:t>
             </a:fld>
             <a:endParaRPr lang="ko-KR" altLang="en-US"/>
           </a:p>
@@ -2384,7 +2385,7 @@
           <a:p>
             <a:fld id="{F3E3B444-461C-43DF-9895-EF8F91AA3F26}" type="datetimeFigureOut">
               <a:rPr lang="ko-KR" altLang="en-US" smtClean="0"/>
-              <a:t>2025-05-24</a:t>
+              <a:t>2025-05-26</a:t>
             </a:fld>
             <a:endParaRPr lang="ko-KR" altLang="en-US"/>
           </a:p>
@@ -2672,7 +2673,7 @@
           <a:p>
             <a:fld id="{F3E3B444-461C-43DF-9895-EF8F91AA3F26}" type="datetimeFigureOut">
               <a:rPr lang="ko-KR" altLang="en-US" smtClean="0"/>
-              <a:t>2025-05-24</a:t>
+              <a:t>2025-05-26</a:t>
             </a:fld>
             <a:endParaRPr lang="ko-KR" altLang="en-US"/>
           </a:p>
@@ -2919,7 +2920,7 @@
           <a:p>
             <a:fld id="{F3E3B444-461C-43DF-9895-EF8F91AA3F26}" type="datetimeFigureOut">
               <a:rPr lang="ko-KR" altLang="en-US" smtClean="0"/>
-              <a:t>2025-05-24</a:t>
+              <a:t>2025-05-26</a:t>
             </a:fld>
             <a:endParaRPr lang="ko-KR" altLang="en-US"/>
           </a:p>
@@ -8127,6 +8128,71 @@
 </p:sld>
 </file>
 
+<file path=ppt/slides/slide6.xml><?xml version="1.0" encoding="utf-8"?>
+<p:sld xmlns:a="http://schemas.openxmlformats.org/drawingml/2006/main" xmlns:r="http://schemas.openxmlformats.org/officeDocument/2006/relationships" xmlns:p="http://schemas.openxmlformats.org/presentationml/2006/main">
+  <p:cSld>
+    <p:spTree>
+      <p:nvGrpSpPr>
+        <p:cNvPr id="1" name=""/>
+        <p:cNvGrpSpPr/>
+        <p:nvPr/>
+      </p:nvGrpSpPr>
+      <p:grpSpPr>
+        <a:xfrm>
+          <a:off x="0" y="0"/>
+          <a:ext cx="0" cy="0"/>
+          <a:chOff x="0" y="0"/>
+          <a:chExt cx="0" cy="0"/>
+        </a:xfrm>
+      </p:grpSpPr>
+      <p:pic>
+        <p:nvPicPr>
+          <p:cNvPr id="5" name="그림 4" descr="블랙, 어둠이(가) 표시된 사진&#10;&#10;AI가 생성한 콘텐츠는 부정확할 수 있습니다.">
+            <a:extLst>
+              <a:ext uri="{FF2B5EF4-FFF2-40B4-BE49-F238E27FC236}">
+                <a16:creationId xmlns:a16="http://schemas.microsoft.com/office/drawing/2014/main" id="{DBC1B647-F71C-3BBF-DD9F-2019289E837D}"/>
+              </a:ext>
+            </a:extLst>
+          </p:cNvPr>
+          <p:cNvPicPr>
+            <a:picLocks noChangeAspect="1"/>
+          </p:cNvPicPr>
+          <p:nvPr/>
+        </p:nvPicPr>
+        <p:blipFill>
+          <a:blip r:embed="rId2">
+            <a:extLst>
+              <a:ext uri="{28A0092B-C50C-407E-A947-70E740481C1C}">
+                <a14:useLocalDpi xmlns:a14="http://schemas.microsoft.com/office/drawing/2010/main" val="0"/>
+              </a:ext>
+            </a:extLst>
+          </a:blip>
+          <a:srcRect l="23680" t="20459" r="20216" b="36043"/>
+          <a:stretch/>
+        </p:blipFill>
+        <p:spPr>
+          <a:xfrm>
+            <a:off x="4461164" y="1459345"/>
+            <a:ext cx="3740727" cy="2900220"/>
+          </a:xfrm>
+          <a:prstGeom prst="rect">
+            <a:avLst/>
+          </a:prstGeom>
+        </p:spPr>
+      </p:pic>
+    </p:spTree>
+    <p:extLst>
+      <p:ext uri="{BB962C8B-B14F-4D97-AF65-F5344CB8AC3E}">
+        <p14:creationId xmlns:p14="http://schemas.microsoft.com/office/powerpoint/2010/main" val="3253489929"/>
+      </p:ext>
+    </p:extLst>
+  </p:cSld>
+  <p:clrMapOvr>
+    <a:masterClrMapping/>
+  </p:clrMapOvr>
+</p:sld>
+</file>
+
 <file path=ppt/theme/theme1.xml><?xml version="1.0" encoding="utf-8"?>
 <a:theme xmlns:a="http://schemas.openxmlformats.org/drawingml/2006/main" name="Office 테마">
   <a:themeElements>

--- a/RawImages/imagePPT.pptx
+++ b/RawImages/imagePPT.pptx
@@ -6,7 +6,8 @@
   </p:sldMasterIdLst>
   <p:sldIdLst>
     <p:sldId id="256" r:id="rId2"/>
-    <p:sldId id="257" r:id="rId3"/>
+    <p:sldId id="258" r:id="rId3"/>
+    <p:sldId id="257" r:id="rId4"/>
   </p:sldIdLst>
   <p:sldSz cx="12192000" cy="6858000"/>
   <p:notesSz cx="6858000" cy="9144000"/>
@@ -260,7 +261,7 @@
           <a:p>
             <a:fld id="{F3E3B444-461C-43DF-9895-EF8F91AA3F26}" type="datetimeFigureOut">
               <a:rPr lang="ko-KR" altLang="en-US" smtClean="0"/>
-              <a:t>2025-05-19</a:t>
+              <a:t>2025-06-01</a:t>
             </a:fld>
             <a:endParaRPr lang="ko-KR" altLang="en-US"/>
           </a:p>
@@ -458,7 +459,7 @@
           <a:p>
             <a:fld id="{F3E3B444-461C-43DF-9895-EF8F91AA3F26}" type="datetimeFigureOut">
               <a:rPr lang="ko-KR" altLang="en-US" smtClean="0"/>
-              <a:t>2025-05-19</a:t>
+              <a:t>2025-06-01</a:t>
             </a:fld>
             <a:endParaRPr lang="ko-KR" altLang="en-US"/>
           </a:p>
@@ -666,7 +667,7 @@
           <a:p>
             <a:fld id="{F3E3B444-461C-43DF-9895-EF8F91AA3F26}" type="datetimeFigureOut">
               <a:rPr lang="ko-KR" altLang="en-US" smtClean="0"/>
-              <a:t>2025-05-19</a:t>
+              <a:t>2025-06-01</a:t>
             </a:fld>
             <a:endParaRPr lang="ko-KR" altLang="en-US"/>
           </a:p>
@@ -864,7 +865,7 @@
           <a:p>
             <a:fld id="{F3E3B444-461C-43DF-9895-EF8F91AA3F26}" type="datetimeFigureOut">
               <a:rPr lang="ko-KR" altLang="en-US" smtClean="0"/>
-              <a:t>2025-05-19</a:t>
+              <a:t>2025-06-01</a:t>
             </a:fld>
             <a:endParaRPr lang="ko-KR" altLang="en-US"/>
           </a:p>
@@ -1139,7 +1140,7 @@
           <a:p>
             <a:fld id="{F3E3B444-461C-43DF-9895-EF8F91AA3F26}" type="datetimeFigureOut">
               <a:rPr lang="ko-KR" altLang="en-US" smtClean="0"/>
-              <a:t>2025-05-19</a:t>
+              <a:t>2025-06-01</a:t>
             </a:fld>
             <a:endParaRPr lang="ko-KR" altLang="en-US"/>
           </a:p>
@@ -1404,7 +1405,7 @@
           <a:p>
             <a:fld id="{F3E3B444-461C-43DF-9895-EF8F91AA3F26}" type="datetimeFigureOut">
               <a:rPr lang="ko-KR" altLang="en-US" smtClean="0"/>
-              <a:t>2025-05-19</a:t>
+              <a:t>2025-06-01</a:t>
             </a:fld>
             <a:endParaRPr lang="ko-KR" altLang="en-US"/>
           </a:p>
@@ -1816,7 +1817,7 @@
           <a:p>
             <a:fld id="{F3E3B444-461C-43DF-9895-EF8F91AA3F26}" type="datetimeFigureOut">
               <a:rPr lang="ko-KR" altLang="en-US" smtClean="0"/>
-              <a:t>2025-05-19</a:t>
+              <a:t>2025-06-01</a:t>
             </a:fld>
             <a:endParaRPr lang="ko-KR" altLang="en-US"/>
           </a:p>
@@ -1957,7 +1958,7 @@
           <a:p>
             <a:fld id="{F3E3B444-461C-43DF-9895-EF8F91AA3F26}" type="datetimeFigureOut">
               <a:rPr lang="ko-KR" altLang="en-US" smtClean="0"/>
-              <a:t>2025-05-19</a:t>
+              <a:t>2025-06-01</a:t>
             </a:fld>
             <a:endParaRPr lang="ko-KR" altLang="en-US"/>
           </a:p>
@@ -2070,7 +2071,7 @@
           <a:p>
             <a:fld id="{F3E3B444-461C-43DF-9895-EF8F91AA3F26}" type="datetimeFigureOut">
               <a:rPr lang="ko-KR" altLang="en-US" smtClean="0"/>
-              <a:t>2025-05-19</a:t>
+              <a:t>2025-06-01</a:t>
             </a:fld>
             <a:endParaRPr lang="ko-KR" altLang="en-US"/>
           </a:p>
@@ -2381,7 +2382,7 @@
           <a:p>
             <a:fld id="{F3E3B444-461C-43DF-9895-EF8F91AA3F26}" type="datetimeFigureOut">
               <a:rPr lang="ko-KR" altLang="en-US" smtClean="0"/>
-              <a:t>2025-05-19</a:t>
+              <a:t>2025-06-01</a:t>
             </a:fld>
             <a:endParaRPr lang="ko-KR" altLang="en-US"/>
           </a:p>
@@ -2669,7 +2670,7 @@
           <a:p>
             <a:fld id="{F3E3B444-461C-43DF-9895-EF8F91AA3F26}" type="datetimeFigureOut">
               <a:rPr lang="ko-KR" altLang="en-US" smtClean="0"/>
-              <a:t>2025-05-19</a:t>
+              <a:t>2025-06-01</a:t>
             </a:fld>
             <a:endParaRPr lang="ko-KR" altLang="en-US"/>
           </a:p>
@@ -2916,7 +2917,7 @@
           <a:p>
             <a:fld id="{F3E3B444-461C-43DF-9895-EF8F91AA3F26}" type="datetimeFigureOut">
               <a:rPr lang="ko-KR" altLang="en-US" smtClean="0"/>
-              <a:t>2025-05-19</a:t>
+              <a:t>2025-06-01</a:t>
             </a:fld>
             <a:endParaRPr lang="ko-KR" altLang="en-US"/>
           </a:p>
@@ -4495,6 +4496,79 @@
 </file>
 
 <file path=ppt/slides/slide2.xml><?xml version="1.0" encoding="utf-8"?>
+<p:sld xmlns:a="http://schemas.openxmlformats.org/drawingml/2006/main" xmlns:r="http://schemas.openxmlformats.org/officeDocument/2006/relationships" xmlns:p="http://schemas.openxmlformats.org/presentationml/2006/main">
+  <p:cSld>
+    <p:spTree>
+      <p:nvGrpSpPr>
+        <p:cNvPr id="1" name=""/>
+        <p:cNvGrpSpPr/>
+        <p:nvPr/>
+      </p:nvGrpSpPr>
+      <p:grpSpPr>
+        <a:xfrm>
+          <a:off x="0" y="0"/>
+          <a:ext cx="0" cy="0"/>
+          <a:chOff x="0" y="0"/>
+          <a:chExt cx="0" cy="0"/>
+        </a:xfrm>
+      </p:grpSpPr>
+      <p:pic>
+        <p:nvPicPr>
+          <p:cNvPr id="5" name="그림 4" descr="스크린샷, 예술, 패턴이(가) 표시된 사진">
+            <a:extLst>
+              <a:ext uri="{FF2B5EF4-FFF2-40B4-BE49-F238E27FC236}">
+                <a16:creationId xmlns:a16="http://schemas.microsoft.com/office/drawing/2014/main" id="{612506CA-6211-476E-6553-036FB36D3E2A}"/>
+              </a:ext>
+            </a:extLst>
+          </p:cNvPr>
+          <p:cNvPicPr>
+            <a:picLocks noChangeAspect="1"/>
+          </p:cNvPicPr>
+          <p:nvPr/>
+        </p:nvPicPr>
+        <p:blipFill>
+          <a:blip r:embed="rId2">
+            <a:duotone>
+              <a:schemeClr val="accent4">
+                <a:shade val="45000"/>
+                <a:satMod val="135000"/>
+              </a:schemeClr>
+              <a:prstClr val="white"/>
+            </a:duotone>
+            <a:extLst>
+              <a:ext uri="{28A0092B-C50C-407E-A947-70E740481C1C}">
+                <a14:useLocalDpi xmlns:a14="http://schemas.microsoft.com/office/drawing/2010/main" val="0"/>
+              </a:ext>
+            </a:extLst>
+          </a:blip>
+          <a:stretch>
+            <a:fillRect/>
+          </a:stretch>
+        </p:blipFill>
+        <p:spPr>
+          <a:xfrm>
+            <a:off x="0" y="0"/>
+            <a:ext cx="12192000" cy="6858000"/>
+          </a:xfrm>
+          <a:prstGeom prst="rect">
+            <a:avLst/>
+          </a:prstGeom>
+        </p:spPr>
+      </p:pic>
+    </p:spTree>
+    <p:extLst>
+      <p:ext uri="{BB962C8B-B14F-4D97-AF65-F5344CB8AC3E}">
+        <p14:creationId xmlns:p14="http://schemas.microsoft.com/office/powerpoint/2010/main" val="2994381719"/>
+      </p:ext>
+    </p:extLst>
+  </p:cSld>
+  <p:clrMapOvr>
+    <a:masterClrMapping/>
+  </p:clrMapOvr>
+</p:sld>
+</file>
+
+<file path=ppt/slides/slide3.xml><?xml version="1.0" encoding="utf-8"?>
 <p:sld xmlns:a="http://schemas.openxmlformats.org/drawingml/2006/main" xmlns:r="http://schemas.openxmlformats.org/officeDocument/2006/relationships" xmlns:p="http://schemas.openxmlformats.org/presentationml/2006/main">
   <p:cSld>
     <p:spTree>

--- a/RawImages/imagePPT.pptx
+++ b/RawImages/imagePPT.pptx
@@ -4547,7 +4547,7 @@
         </p:blipFill>
         <p:spPr>
           <a:xfrm>
-            <a:off x="0" y="0"/>
+            <a:off x="115147" y="-12209"/>
             <a:ext cx="12192000" cy="6858000"/>
           </a:xfrm>
           <a:prstGeom prst="rect">
@@ -4555,6 +4555,109 @@
           </a:prstGeom>
         </p:spPr>
       </p:pic>
+      <p:grpSp>
+        <p:nvGrpSpPr>
+          <p:cNvPr id="6" name="그룹 5">
+            <a:extLst>
+              <a:ext uri="{FF2B5EF4-FFF2-40B4-BE49-F238E27FC236}">
+                <a16:creationId xmlns:a16="http://schemas.microsoft.com/office/drawing/2014/main" id="{8919BEF4-8226-F864-62F0-7F24EC05D5A7}"/>
+              </a:ext>
+            </a:extLst>
+          </p:cNvPr>
+          <p:cNvGrpSpPr/>
+          <p:nvPr/>
+        </p:nvGrpSpPr>
+        <p:grpSpPr>
+          <a:xfrm>
+            <a:off x="4629296" y="2156791"/>
+            <a:ext cx="2520000" cy="2520000"/>
+            <a:chOff x="4629296" y="2156791"/>
+            <a:chExt cx="2520000" cy="2520000"/>
+          </a:xfrm>
+        </p:grpSpPr>
+        <p:sp>
+          <p:nvSpPr>
+            <p:cNvPr id="4" name="직사각형 3">
+              <a:extLst>
+                <a:ext uri="{FF2B5EF4-FFF2-40B4-BE49-F238E27FC236}">
+                  <a16:creationId xmlns:a16="http://schemas.microsoft.com/office/drawing/2014/main" id="{681B613E-4E9C-964F-98B0-C4633DAAF046}"/>
+                </a:ext>
+              </a:extLst>
+            </p:cNvPr>
+            <p:cNvSpPr/>
+            <p:nvPr/>
+          </p:nvSpPr>
+          <p:spPr>
+            <a:xfrm>
+              <a:off x="4629296" y="2156791"/>
+              <a:ext cx="2520000" cy="2520000"/>
+            </a:xfrm>
+            <a:prstGeom prst="rect">
+              <a:avLst/>
+            </a:prstGeom>
+            <a:solidFill>
+              <a:srgbClr val="7CCBFF"/>
+            </a:solidFill>
+            <a:ln>
+              <a:noFill/>
+            </a:ln>
+          </p:spPr>
+          <p:style>
+            <a:lnRef idx="2">
+              <a:schemeClr val="accent1">
+                <a:shade val="15000"/>
+              </a:schemeClr>
+            </a:lnRef>
+            <a:fillRef idx="1">
+              <a:schemeClr val="accent1"/>
+            </a:fillRef>
+            <a:effectRef idx="0">
+              <a:schemeClr val="accent1"/>
+            </a:effectRef>
+            <a:fontRef idx="minor">
+              <a:schemeClr val="lt1"/>
+            </a:fontRef>
+          </p:style>
+          <p:txBody>
+            <a:bodyPr rtlCol="0" anchor="ctr"/>
+            <a:lstStyle/>
+            <a:p>
+              <a:pPr algn="ctr"/>
+              <a:endParaRPr lang="ko-KR" altLang="en-US"/>
+            </a:p>
+          </p:txBody>
+        </p:sp>
+        <p:pic>
+          <p:nvPicPr>
+            <p:cNvPr id="3" name="그림 2" descr="깡통, 알루미늄 캔, 음료캔, 병이(가) 표시된 사진&#10;&#10;AI가 생성한 콘텐츠는 부정확할 수 있습니다.">
+              <a:extLst>
+                <a:ext uri="{FF2B5EF4-FFF2-40B4-BE49-F238E27FC236}">
+                  <a16:creationId xmlns:a16="http://schemas.microsoft.com/office/drawing/2014/main" id="{C0DFA825-419E-5C4E-A89B-A0494294D0B7}"/>
+                </a:ext>
+              </a:extLst>
+            </p:cNvPr>
+            <p:cNvPicPr>
+              <a:picLocks noChangeAspect="1"/>
+            </p:cNvPicPr>
+            <p:nvPr/>
+          </p:nvPicPr>
+          <p:blipFill>
+            <a:blip r:embed="rId3"/>
+            <a:stretch>
+              <a:fillRect/>
+            </a:stretch>
+          </p:blipFill>
+          <p:spPr>
+            <a:xfrm>
+              <a:off x="5129553" y="2289386"/>
+              <a:ext cx="1519485" cy="2279227"/>
+            </a:xfrm>
+            <a:prstGeom prst="rect">
+              <a:avLst/>
+            </a:prstGeom>
+          </p:spPr>
+        </p:pic>
+      </p:grpSp>
     </p:spTree>
     <p:extLst>
       <p:ext uri="{BB962C8B-B14F-4D97-AF65-F5344CB8AC3E}">

--- a/RawImages/imagePPT.pptx
+++ b/RawImages/imagePPT.pptx
@@ -8,6 +8,7 @@
     <p:sldId id="256" r:id="rId2"/>
     <p:sldId id="258" r:id="rId3"/>
     <p:sldId id="257" r:id="rId4"/>
+    <p:sldId id="259" r:id="rId5"/>
   </p:sldIdLst>
   <p:sldSz cx="12192000" cy="6858000"/>
   <p:notesSz cx="6858000" cy="9144000"/>
@@ -261,7 +262,7 @@
           <a:p>
             <a:fld id="{F3E3B444-461C-43DF-9895-EF8F91AA3F26}" type="datetimeFigureOut">
               <a:rPr lang="ko-KR" altLang="en-US" smtClean="0"/>
-              <a:t>2025-06-01</a:t>
+              <a:t>2025-06-02</a:t>
             </a:fld>
             <a:endParaRPr lang="ko-KR" altLang="en-US"/>
           </a:p>
@@ -459,7 +460,7 @@
           <a:p>
             <a:fld id="{F3E3B444-461C-43DF-9895-EF8F91AA3F26}" type="datetimeFigureOut">
               <a:rPr lang="ko-KR" altLang="en-US" smtClean="0"/>
-              <a:t>2025-06-01</a:t>
+              <a:t>2025-06-02</a:t>
             </a:fld>
             <a:endParaRPr lang="ko-KR" altLang="en-US"/>
           </a:p>
@@ -667,7 +668,7 @@
           <a:p>
             <a:fld id="{F3E3B444-461C-43DF-9895-EF8F91AA3F26}" type="datetimeFigureOut">
               <a:rPr lang="ko-KR" altLang="en-US" smtClean="0"/>
-              <a:t>2025-06-01</a:t>
+              <a:t>2025-06-02</a:t>
             </a:fld>
             <a:endParaRPr lang="ko-KR" altLang="en-US"/>
           </a:p>
@@ -865,7 +866,7 @@
           <a:p>
             <a:fld id="{F3E3B444-461C-43DF-9895-EF8F91AA3F26}" type="datetimeFigureOut">
               <a:rPr lang="ko-KR" altLang="en-US" smtClean="0"/>
-              <a:t>2025-06-01</a:t>
+              <a:t>2025-06-02</a:t>
             </a:fld>
             <a:endParaRPr lang="ko-KR" altLang="en-US"/>
           </a:p>
@@ -1140,7 +1141,7 @@
           <a:p>
             <a:fld id="{F3E3B444-461C-43DF-9895-EF8F91AA3F26}" type="datetimeFigureOut">
               <a:rPr lang="ko-KR" altLang="en-US" smtClean="0"/>
-              <a:t>2025-06-01</a:t>
+              <a:t>2025-06-02</a:t>
             </a:fld>
             <a:endParaRPr lang="ko-KR" altLang="en-US"/>
           </a:p>
@@ -1405,7 +1406,7 @@
           <a:p>
             <a:fld id="{F3E3B444-461C-43DF-9895-EF8F91AA3F26}" type="datetimeFigureOut">
               <a:rPr lang="ko-KR" altLang="en-US" smtClean="0"/>
-              <a:t>2025-06-01</a:t>
+              <a:t>2025-06-02</a:t>
             </a:fld>
             <a:endParaRPr lang="ko-KR" altLang="en-US"/>
           </a:p>
@@ -1817,7 +1818,7 @@
           <a:p>
             <a:fld id="{F3E3B444-461C-43DF-9895-EF8F91AA3F26}" type="datetimeFigureOut">
               <a:rPr lang="ko-KR" altLang="en-US" smtClean="0"/>
-              <a:t>2025-06-01</a:t>
+              <a:t>2025-06-02</a:t>
             </a:fld>
             <a:endParaRPr lang="ko-KR" altLang="en-US"/>
           </a:p>
@@ -1958,7 +1959,7 @@
           <a:p>
             <a:fld id="{F3E3B444-461C-43DF-9895-EF8F91AA3F26}" type="datetimeFigureOut">
               <a:rPr lang="ko-KR" altLang="en-US" smtClean="0"/>
-              <a:t>2025-06-01</a:t>
+              <a:t>2025-06-02</a:t>
             </a:fld>
             <a:endParaRPr lang="ko-KR" altLang="en-US"/>
           </a:p>
@@ -2071,7 +2072,7 @@
           <a:p>
             <a:fld id="{F3E3B444-461C-43DF-9895-EF8F91AA3F26}" type="datetimeFigureOut">
               <a:rPr lang="ko-KR" altLang="en-US" smtClean="0"/>
-              <a:t>2025-06-01</a:t>
+              <a:t>2025-06-02</a:t>
             </a:fld>
             <a:endParaRPr lang="ko-KR" altLang="en-US"/>
           </a:p>
@@ -2382,7 +2383,7 @@
           <a:p>
             <a:fld id="{F3E3B444-461C-43DF-9895-EF8F91AA3F26}" type="datetimeFigureOut">
               <a:rPr lang="ko-KR" altLang="en-US" smtClean="0"/>
-              <a:t>2025-06-01</a:t>
+              <a:t>2025-06-02</a:t>
             </a:fld>
             <a:endParaRPr lang="ko-KR" altLang="en-US"/>
           </a:p>
@@ -2670,7 +2671,7 @@
           <a:p>
             <a:fld id="{F3E3B444-461C-43DF-9895-EF8F91AA3F26}" type="datetimeFigureOut">
               <a:rPr lang="ko-KR" altLang="en-US" smtClean="0"/>
-              <a:t>2025-06-01</a:t>
+              <a:t>2025-06-02</a:t>
             </a:fld>
             <a:endParaRPr lang="ko-KR" altLang="en-US"/>
           </a:p>
@@ -2917,7 +2918,7 @@
           <a:p>
             <a:fld id="{F3E3B444-461C-43DF-9895-EF8F91AA3F26}" type="datetimeFigureOut">
               <a:rPr lang="ko-KR" altLang="en-US" smtClean="0"/>
-              <a:t>2025-06-01</a:t>
+              <a:t>2025-06-02</a:t>
             </a:fld>
             <a:endParaRPr lang="ko-KR" altLang="en-US"/>
           </a:p>
@@ -4832,6 +4833,88 @@
     <p:extLst>
       <p:ext uri="{BB962C8B-B14F-4D97-AF65-F5344CB8AC3E}">
         <p14:creationId xmlns:p14="http://schemas.microsoft.com/office/powerpoint/2010/main" val="1871351606"/>
+      </p:ext>
+    </p:extLst>
+  </p:cSld>
+  <p:clrMapOvr>
+    <a:masterClrMapping/>
+  </p:clrMapOvr>
+</p:sld>
+</file>
+
+<file path=ppt/slides/slide4.xml><?xml version="1.0" encoding="utf-8"?>
+<p:sld xmlns:a="http://schemas.openxmlformats.org/drawingml/2006/main" xmlns:r="http://schemas.openxmlformats.org/officeDocument/2006/relationships" xmlns:p="http://schemas.openxmlformats.org/presentationml/2006/main">
+  <p:cSld>
+    <p:spTree>
+      <p:nvGrpSpPr>
+        <p:cNvPr id="1" name=""/>
+        <p:cNvGrpSpPr/>
+        <p:nvPr/>
+      </p:nvGrpSpPr>
+      <p:grpSpPr>
+        <a:xfrm>
+          <a:off x="0" y="0"/>
+          <a:ext cx="0" cy="0"/>
+          <a:chOff x="0" y="0"/>
+          <a:chExt cx="0" cy="0"/>
+        </a:xfrm>
+      </p:grpSpPr>
+      <p:sp>
+        <p:nvSpPr>
+          <p:cNvPr id="5" name="순서도: 판단 4">
+            <a:extLst>
+              <a:ext uri="{FF2B5EF4-FFF2-40B4-BE49-F238E27FC236}">
+                <a16:creationId xmlns:a16="http://schemas.microsoft.com/office/drawing/2014/main" id="{A3D28B9D-1DAE-FDF5-B96D-0583A31B4E23}"/>
+              </a:ext>
+            </a:extLst>
+          </p:cNvPr>
+          <p:cNvSpPr/>
+          <p:nvPr/>
+        </p:nvSpPr>
+        <p:spPr>
+          <a:xfrm rot="5400000">
+            <a:off x="6414052" y="2597426"/>
+            <a:ext cx="636104" cy="291547"/>
+          </a:xfrm>
+          <a:prstGeom prst="flowChartDecision">
+            <a:avLst/>
+          </a:prstGeom>
+          <a:solidFill>
+            <a:srgbClr val="FFFF00"/>
+          </a:solidFill>
+          <a:ln>
+            <a:noFill/>
+          </a:ln>
+        </p:spPr>
+        <p:style>
+          <a:lnRef idx="2">
+            <a:schemeClr val="accent1">
+              <a:shade val="15000"/>
+            </a:schemeClr>
+          </a:lnRef>
+          <a:fillRef idx="1">
+            <a:schemeClr val="accent1"/>
+          </a:fillRef>
+          <a:effectRef idx="0">
+            <a:schemeClr val="accent1"/>
+          </a:effectRef>
+          <a:fontRef idx="minor">
+            <a:schemeClr val="lt1"/>
+          </a:fontRef>
+        </p:style>
+        <p:txBody>
+          <a:bodyPr rtlCol="0" anchor="ctr"/>
+          <a:lstStyle/>
+          <a:p>
+            <a:pPr algn="ctr"/>
+            <a:endParaRPr lang="ko-KR" altLang="en-US"/>
+          </a:p>
+        </p:txBody>
+      </p:sp>
+    </p:spTree>
+    <p:extLst>
+      <p:ext uri="{BB962C8B-B14F-4D97-AF65-F5344CB8AC3E}">
+        <p14:creationId xmlns:p14="http://schemas.microsoft.com/office/powerpoint/2010/main" val="763899694"/>
       </p:ext>
     </p:extLst>
   </p:cSld>

--- a/RawImages/imagePPT.pptx
+++ b/RawImages/imagePPT.pptx
@@ -262,7 +262,7 @@
           <a:p>
             <a:fld id="{F3E3B444-461C-43DF-9895-EF8F91AA3F26}" type="datetimeFigureOut">
               <a:rPr lang="ko-KR" altLang="en-US" smtClean="0"/>
-              <a:t>2025-06-02</a:t>
+              <a:t>2025-06-04</a:t>
             </a:fld>
             <a:endParaRPr lang="ko-KR" altLang="en-US"/>
           </a:p>
@@ -460,7 +460,7 @@
           <a:p>
             <a:fld id="{F3E3B444-461C-43DF-9895-EF8F91AA3F26}" type="datetimeFigureOut">
               <a:rPr lang="ko-KR" altLang="en-US" smtClean="0"/>
-              <a:t>2025-06-02</a:t>
+              <a:t>2025-06-04</a:t>
             </a:fld>
             <a:endParaRPr lang="ko-KR" altLang="en-US"/>
           </a:p>
@@ -668,7 +668,7 @@
           <a:p>
             <a:fld id="{F3E3B444-461C-43DF-9895-EF8F91AA3F26}" type="datetimeFigureOut">
               <a:rPr lang="ko-KR" altLang="en-US" smtClean="0"/>
-              <a:t>2025-06-02</a:t>
+              <a:t>2025-06-04</a:t>
             </a:fld>
             <a:endParaRPr lang="ko-KR" altLang="en-US"/>
           </a:p>
@@ -866,7 +866,7 @@
           <a:p>
             <a:fld id="{F3E3B444-461C-43DF-9895-EF8F91AA3F26}" type="datetimeFigureOut">
               <a:rPr lang="ko-KR" altLang="en-US" smtClean="0"/>
-              <a:t>2025-06-02</a:t>
+              <a:t>2025-06-04</a:t>
             </a:fld>
             <a:endParaRPr lang="ko-KR" altLang="en-US"/>
           </a:p>
@@ -1141,7 +1141,7 @@
           <a:p>
             <a:fld id="{F3E3B444-461C-43DF-9895-EF8F91AA3F26}" type="datetimeFigureOut">
               <a:rPr lang="ko-KR" altLang="en-US" smtClean="0"/>
-              <a:t>2025-06-02</a:t>
+              <a:t>2025-06-04</a:t>
             </a:fld>
             <a:endParaRPr lang="ko-KR" altLang="en-US"/>
           </a:p>
@@ -1406,7 +1406,7 @@
           <a:p>
             <a:fld id="{F3E3B444-461C-43DF-9895-EF8F91AA3F26}" type="datetimeFigureOut">
               <a:rPr lang="ko-KR" altLang="en-US" smtClean="0"/>
-              <a:t>2025-06-02</a:t>
+              <a:t>2025-06-04</a:t>
             </a:fld>
             <a:endParaRPr lang="ko-KR" altLang="en-US"/>
           </a:p>
@@ -1818,7 +1818,7 @@
           <a:p>
             <a:fld id="{F3E3B444-461C-43DF-9895-EF8F91AA3F26}" type="datetimeFigureOut">
               <a:rPr lang="ko-KR" altLang="en-US" smtClean="0"/>
-              <a:t>2025-06-02</a:t>
+              <a:t>2025-06-04</a:t>
             </a:fld>
             <a:endParaRPr lang="ko-KR" altLang="en-US"/>
           </a:p>
@@ -1959,7 +1959,7 @@
           <a:p>
             <a:fld id="{F3E3B444-461C-43DF-9895-EF8F91AA3F26}" type="datetimeFigureOut">
               <a:rPr lang="ko-KR" altLang="en-US" smtClean="0"/>
-              <a:t>2025-06-02</a:t>
+              <a:t>2025-06-04</a:t>
             </a:fld>
             <a:endParaRPr lang="ko-KR" altLang="en-US"/>
           </a:p>
@@ -2072,7 +2072,7 @@
           <a:p>
             <a:fld id="{F3E3B444-461C-43DF-9895-EF8F91AA3F26}" type="datetimeFigureOut">
               <a:rPr lang="ko-KR" altLang="en-US" smtClean="0"/>
-              <a:t>2025-06-02</a:t>
+              <a:t>2025-06-04</a:t>
             </a:fld>
             <a:endParaRPr lang="ko-KR" altLang="en-US"/>
           </a:p>
@@ -2383,7 +2383,7 @@
           <a:p>
             <a:fld id="{F3E3B444-461C-43DF-9895-EF8F91AA3F26}" type="datetimeFigureOut">
               <a:rPr lang="ko-KR" altLang="en-US" smtClean="0"/>
-              <a:t>2025-06-02</a:t>
+              <a:t>2025-06-04</a:t>
             </a:fld>
             <a:endParaRPr lang="ko-KR" altLang="en-US"/>
           </a:p>
@@ -2671,7 +2671,7 @@
           <a:p>
             <a:fld id="{F3E3B444-461C-43DF-9895-EF8F91AA3F26}" type="datetimeFigureOut">
               <a:rPr lang="ko-KR" altLang="en-US" smtClean="0"/>
-              <a:t>2025-06-02</a:t>
+              <a:t>2025-06-04</a:t>
             </a:fld>
             <a:endParaRPr lang="ko-KR" altLang="en-US"/>
           </a:p>
@@ -2918,7 +2918,7 @@
           <a:p>
             <a:fld id="{F3E3B444-461C-43DF-9895-EF8F91AA3F26}" type="datetimeFigureOut">
               <a:rPr lang="ko-KR" altLang="en-US" smtClean="0"/>
-              <a:t>2025-06-02</a:t>
+              <a:t>2025-06-04</a:t>
             </a:fld>
             <a:endParaRPr lang="ko-KR" altLang="en-US"/>
           </a:p>
@@ -4298,44 +4298,6 @@
       </p:sp>
       <p:cxnSp>
         <p:nvCxnSpPr>
-          <p:cNvPr id="11" name="직선 연결선 10">
-            <a:extLst>
-              <a:ext uri="{FF2B5EF4-FFF2-40B4-BE49-F238E27FC236}">
-                <a16:creationId xmlns:a16="http://schemas.microsoft.com/office/drawing/2014/main" id="{36EB2DCD-3AE7-1EA8-8BC6-C1DCBCB4CA81}"/>
-              </a:ext>
-            </a:extLst>
-          </p:cNvPr>
-          <p:cNvCxnSpPr>
-            <a:cxnSpLocks/>
-          </p:cNvCxnSpPr>
-          <p:nvPr/>
-        </p:nvCxnSpPr>
-        <p:spPr>
-          <a:xfrm flipH="1">
-            <a:off x="5663566" y="3789587"/>
-            <a:ext cx="1511139" cy="1150924"/>
-          </a:xfrm>
-          <a:prstGeom prst="line">
-            <a:avLst/>
-          </a:prstGeom>
-        </p:spPr>
-        <p:style>
-          <a:lnRef idx="2">
-            <a:schemeClr val="accent1"/>
-          </a:lnRef>
-          <a:fillRef idx="0">
-            <a:schemeClr val="accent1"/>
-          </a:fillRef>
-          <a:effectRef idx="1">
-            <a:schemeClr val="accent1"/>
-          </a:effectRef>
-          <a:fontRef idx="minor">
-            <a:schemeClr val="tx1"/>
-          </a:fontRef>
-        </p:style>
-      </p:cxnSp>
-      <p:cxnSp>
-        <p:nvCxnSpPr>
           <p:cNvPr id="13" name="직선 연결선 12">
             <a:extLst>
               <a:ext uri="{FF2B5EF4-FFF2-40B4-BE49-F238E27FC236}">
@@ -4391,19 +4353,19 @@
           </a:xfrm>
           <a:prstGeom prst="blockArc">
             <a:avLst>
-              <a:gd name="adj1" fmla="val 7918221"/>
-              <a:gd name="adj2" fmla="val 3692070"/>
-              <a:gd name="adj3" fmla="val 13701"/>
+              <a:gd name="adj1" fmla="val 7701692"/>
+              <a:gd name="adj2" fmla="val 4184773"/>
+              <a:gd name="adj3" fmla="val 13918"/>
             </a:avLst>
           </a:prstGeom>
           <a:solidFill>
-            <a:srgbClr val="0070C0">
+            <a:srgbClr val="92D050">
               <a:alpha val="10000"/>
             </a:srgbClr>
           </a:solidFill>
           <a:ln>
             <a:solidFill>
-              <a:srgbClr val="0070C0">
+              <a:srgbClr val="92D050">
                 <a:alpha val="50000"/>
               </a:srgbClr>
             </a:solidFill>
@@ -4460,8 +4422,46 @@
           <p:nvPr/>
         </p:nvCxnSpPr>
         <p:spPr>
-          <a:xfrm rot="4680000" flipH="1">
-            <a:off x="5256417" y="4432780"/>
+          <a:xfrm rot="5400000" flipH="1">
+            <a:off x="5222127" y="4448020"/>
+            <a:ext cx="2672541" cy="0"/>
+          </a:xfrm>
+          <a:prstGeom prst="line">
+            <a:avLst/>
+          </a:prstGeom>
+        </p:spPr>
+        <p:style>
+          <a:lnRef idx="2">
+            <a:schemeClr val="accent1"/>
+          </a:lnRef>
+          <a:fillRef idx="0">
+            <a:schemeClr val="accent1"/>
+          </a:fillRef>
+          <a:effectRef idx="1">
+            <a:schemeClr val="accent1"/>
+          </a:effectRef>
+          <a:fontRef idx="minor">
+            <a:schemeClr val="tx1"/>
+          </a:fontRef>
+        </p:style>
+      </p:cxnSp>
+      <p:cxnSp>
+        <p:nvCxnSpPr>
+          <p:cNvPr id="3" name="직선 연결선 2">
+            <a:extLst>
+              <a:ext uri="{FF2B5EF4-FFF2-40B4-BE49-F238E27FC236}">
+                <a16:creationId xmlns:a16="http://schemas.microsoft.com/office/drawing/2014/main" id="{56C769F9-76F2-6CBD-2911-4DD2C56DD32E}"/>
+              </a:ext>
+            </a:extLst>
+          </p:cNvPr>
+          <p:cNvCxnSpPr>
+            <a:cxnSpLocks/>
+          </p:cNvCxnSpPr>
+          <p:nvPr/>
+        </p:nvCxnSpPr>
+        <p:spPr>
+          <a:xfrm rot="-1800000" flipH="1">
+            <a:off x="5172879" y="4289365"/>
             <a:ext cx="2672541" cy="0"/>
           </a:xfrm>
           <a:prstGeom prst="line">
@@ -4513,6 +4513,55 @@
           <a:chExt cx="0" cy="0"/>
         </a:xfrm>
       </p:grpSpPr>
+      <p:sp>
+        <p:nvSpPr>
+          <p:cNvPr id="9" name="직사각형 8">
+            <a:extLst>
+              <a:ext uri="{FF2B5EF4-FFF2-40B4-BE49-F238E27FC236}">
+                <a16:creationId xmlns:a16="http://schemas.microsoft.com/office/drawing/2014/main" id="{8BA66B95-0EC1-5B11-6D48-7BD4CD745DD6}"/>
+              </a:ext>
+            </a:extLst>
+          </p:cNvPr>
+          <p:cNvSpPr/>
+          <p:nvPr/>
+        </p:nvSpPr>
+        <p:spPr>
+          <a:xfrm>
+            <a:off x="8302487" y="1987826"/>
+            <a:ext cx="1822174" cy="2120348"/>
+          </a:xfrm>
+          <a:prstGeom prst="rect">
+            <a:avLst/>
+          </a:prstGeom>
+          <a:solidFill>
+            <a:schemeClr val="bg1"/>
+          </a:solidFill>
+        </p:spPr>
+        <p:style>
+          <a:lnRef idx="2">
+            <a:schemeClr val="accent1">
+              <a:shade val="15000"/>
+            </a:schemeClr>
+          </a:lnRef>
+          <a:fillRef idx="1">
+            <a:schemeClr val="accent1"/>
+          </a:fillRef>
+          <a:effectRef idx="0">
+            <a:schemeClr val="accent1"/>
+          </a:effectRef>
+          <a:fontRef idx="minor">
+            <a:schemeClr val="lt1"/>
+          </a:fontRef>
+        </p:style>
+        <p:txBody>
+          <a:bodyPr rtlCol="0" anchor="ctr"/>
+          <a:lstStyle/>
+          <a:p>
+            <a:pPr algn="ctr"/>
+            <a:endParaRPr lang="ko-KR" altLang="en-US"/>
+          </a:p>
+        </p:txBody>
+      </p:sp>
       <p:pic>
         <p:nvPicPr>
           <p:cNvPr id="5" name="그림 4" descr="스크린샷, 예술, 패턴이(가) 표시된 사진">
@@ -4530,7 +4579,7 @@
         <p:blipFill>
           <a:blip r:embed="rId2">
             <a:duotone>
-              <a:schemeClr val="accent4">
+              <a:schemeClr val="accent6">
                 <a:shade val="45000"/>
                 <a:satMod val="135000"/>
               </a:schemeClr>
@@ -4548,7 +4597,7 @@
         </p:blipFill>
         <p:spPr>
           <a:xfrm>
-            <a:off x="115147" y="-12209"/>
+            <a:off x="55513" y="-12209"/>
             <a:ext cx="12192000" cy="6858000"/>
           </a:xfrm>
           <a:prstGeom prst="rect">
@@ -4570,7 +4619,7 @@
         </p:nvGrpSpPr>
         <p:grpSpPr>
           <a:xfrm>
-            <a:off x="4629296" y="2156791"/>
+            <a:off x="4510026" y="2169000"/>
             <a:ext cx="2520000" cy="2520000"/>
             <a:chOff x="4629296" y="2156791"/>
             <a:chExt cx="2520000" cy="2520000"/>
@@ -4659,6 +4708,189 @@
           </p:spPr>
         </p:pic>
       </p:grpSp>
+      <p:sp>
+        <p:nvSpPr>
+          <p:cNvPr id="8" name="직사각형 7">
+            <a:extLst>
+              <a:ext uri="{FF2B5EF4-FFF2-40B4-BE49-F238E27FC236}">
+                <a16:creationId xmlns:a16="http://schemas.microsoft.com/office/drawing/2014/main" id="{74D44FD0-8909-B977-FE47-DB93850FCC0B}"/>
+              </a:ext>
+            </a:extLst>
+          </p:cNvPr>
+          <p:cNvSpPr/>
+          <p:nvPr/>
+        </p:nvSpPr>
+        <p:spPr>
+          <a:xfrm>
+            <a:off x="1777575" y="2289386"/>
+            <a:ext cx="1338469" cy="1209188"/>
+          </a:xfrm>
+          <a:prstGeom prst="rect">
+            <a:avLst/>
+          </a:prstGeom>
+          <a:solidFill>
+            <a:srgbClr val="72B088"/>
+          </a:solidFill>
+          <a:ln>
+            <a:solidFill>
+              <a:schemeClr val="accent1"/>
+            </a:solidFill>
+          </a:ln>
+        </p:spPr>
+        <p:style>
+          <a:lnRef idx="2">
+            <a:schemeClr val="accent1">
+              <a:shade val="15000"/>
+            </a:schemeClr>
+          </a:lnRef>
+          <a:fillRef idx="1">
+            <a:schemeClr val="accent1"/>
+          </a:fillRef>
+          <a:effectRef idx="0">
+            <a:schemeClr val="accent1"/>
+          </a:effectRef>
+          <a:fontRef idx="minor">
+            <a:schemeClr val="lt1"/>
+          </a:fontRef>
+        </p:style>
+        <p:txBody>
+          <a:bodyPr rtlCol="0" anchor="ctr"/>
+          <a:lstStyle/>
+          <a:p>
+            <a:pPr algn="ctr"/>
+            <a:endParaRPr lang="ko-KR" altLang="en-US" dirty="0"/>
+          </a:p>
+        </p:txBody>
+      </p:sp>
+      <p:sp>
+        <p:nvSpPr>
+          <p:cNvPr id="10" name="직사각형 9">
+            <a:extLst>
+              <a:ext uri="{FF2B5EF4-FFF2-40B4-BE49-F238E27FC236}">
+                <a16:creationId xmlns:a16="http://schemas.microsoft.com/office/drawing/2014/main" id="{DE8F1AAE-2CEC-F0D9-010C-3284DCF52DE6}"/>
+              </a:ext>
+            </a:extLst>
+          </p:cNvPr>
+          <p:cNvSpPr>
+            <a:spLocks/>
+          </p:cNvSpPr>
+          <p:nvPr/>
+        </p:nvSpPr>
+        <p:spPr>
+          <a:xfrm>
+            <a:off x="3237565" y="1773440"/>
+            <a:ext cx="1338469" cy="1209188"/>
+          </a:xfrm>
+          <a:prstGeom prst="rect">
+            <a:avLst/>
+          </a:prstGeom>
+          <a:solidFill>
+            <a:srgbClr val="5CA476"/>
+          </a:solidFill>
+          <a:ln>
+            <a:solidFill>
+              <a:schemeClr val="accent1"/>
+            </a:solidFill>
+          </a:ln>
+        </p:spPr>
+        <p:style>
+          <a:lnRef idx="2">
+            <a:schemeClr val="accent1">
+              <a:shade val="15000"/>
+            </a:schemeClr>
+          </a:lnRef>
+          <a:fillRef idx="1">
+            <a:schemeClr val="accent1"/>
+          </a:fillRef>
+          <a:effectRef idx="0">
+            <a:schemeClr val="accent1"/>
+          </a:effectRef>
+          <a:fontRef idx="minor">
+            <a:schemeClr val="lt1"/>
+          </a:fontRef>
+        </p:style>
+        <p:txBody>
+          <a:bodyPr rtlCol="0" anchor="ctr"/>
+          <a:lstStyle/>
+          <a:p>
+            <a:pPr algn="ctr"/>
+            <a:endParaRPr lang="ko-KR" altLang="en-US" dirty="0"/>
+          </a:p>
+        </p:txBody>
+      </p:sp>
+      <p:sp>
+        <p:nvSpPr>
+          <p:cNvPr id="2" name="막힌 원호 1">
+            <a:extLst>
+              <a:ext uri="{FF2B5EF4-FFF2-40B4-BE49-F238E27FC236}">
+                <a16:creationId xmlns:a16="http://schemas.microsoft.com/office/drawing/2014/main" id="{B2CDC518-A4E0-0E27-AF74-F89954C38566}"/>
+              </a:ext>
+            </a:extLst>
+          </p:cNvPr>
+          <p:cNvSpPr/>
+          <p:nvPr/>
+        </p:nvSpPr>
+        <p:spPr>
+          <a:xfrm rot="1247646">
+            <a:off x="8080369" y="2718115"/>
+            <a:ext cx="1800000" cy="1800000"/>
+          </a:xfrm>
+          <a:prstGeom prst="blockArc">
+            <a:avLst>
+              <a:gd name="adj1" fmla="val 7701692"/>
+              <a:gd name="adj2" fmla="val 4184773"/>
+              <a:gd name="adj3" fmla="val 13918"/>
+            </a:avLst>
+          </a:prstGeom>
+          <a:solidFill>
+            <a:srgbClr val="92D050">
+              <a:alpha val="10000"/>
+            </a:srgbClr>
+          </a:solidFill>
+          <a:ln>
+            <a:solidFill>
+              <a:srgbClr val="92D050">
+                <a:alpha val="50000"/>
+              </a:srgbClr>
+            </a:solidFill>
+          </a:ln>
+          <a:effectLst>
+            <a:glow rad="38100">
+              <a:srgbClr val="0070C0">
+                <a:alpha val="20000"/>
+              </a:srgbClr>
+            </a:glow>
+          </a:effectLst>
+        </p:spPr>
+        <p:style>
+          <a:lnRef idx="2">
+            <a:schemeClr val="accent1">
+              <a:shade val="15000"/>
+            </a:schemeClr>
+          </a:lnRef>
+          <a:fillRef idx="1">
+            <a:schemeClr val="accent1"/>
+          </a:fillRef>
+          <a:effectRef idx="0">
+            <a:schemeClr val="accent1"/>
+          </a:effectRef>
+          <a:fontRef idx="minor">
+            <a:schemeClr val="lt1"/>
+          </a:fontRef>
+        </p:style>
+        <p:txBody>
+          <a:bodyPr rtlCol="0" anchor="ctr"/>
+          <a:lstStyle/>
+          <a:p>
+            <a:pPr algn="ctr"/>
+            <a:endParaRPr lang="ko-KR" altLang="en-US" dirty="0">
+              <a:solidFill>
+                <a:schemeClr val="tx1"/>
+              </a:solidFill>
+            </a:endParaRPr>
+          </a:p>
+        </p:txBody>
+      </p:sp>
     </p:spTree>
     <p:extLst>
       <p:ext uri="{BB962C8B-B14F-4D97-AF65-F5344CB8AC3E}">

--- a/RawImages/imagePPT.pptx
+++ b/RawImages/imagePPT.pptx
@@ -262,7 +262,7 @@
           <a:p>
             <a:fld id="{F3E3B444-461C-43DF-9895-EF8F91AA3F26}" type="datetimeFigureOut">
               <a:rPr lang="ko-KR" altLang="en-US" smtClean="0"/>
-              <a:t>2025-06-04</a:t>
+              <a:t>2025-06-07</a:t>
             </a:fld>
             <a:endParaRPr lang="ko-KR" altLang="en-US"/>
           </a:p>
@@ -460,7 +460,7 @@
           <a:p>
             <a:fld id="{F3E3B444-461C-43DF-9895-EF8F91AA3F26}" type="datetimeFigureOut">
               <a:rPr lang="ko-KR" altLang="en-US" smtClean="0"/>
-              <a:t>2025-06-04</a:t>
+              <a:t>2025-06-07</a:t>
             </a:fld>
             <a:endParaRPr lang="ko-KR" altLang="en-US"/>
           </a:p>
@@ -668,7 +668,7 @@
           <a:p>
             <a:fld id="{F3E3B444-461C-43DF-9895-EF8F91AA3F26}" type="datetimeFigureOut">
               <a:rPr lang="ko-KR" altLang="en-US" smtClean="0"/>
-              <a:t>2025-06-04</a:t>
+              <a:t>2025-06-07</a:t>
             </a:fld>
             <a:endParaRPr lang="ko-KR" altLang="en-US"/>
           </a:p>
@@ -866,7 +866,7 @@
           <a:p>
             <a:fld id="{F3E3B444-461C-43DF-9895-EF8F91AA3F26}" type="datetimeFigureOut">
               <a:rPr lang="ko-KR" altLang="en-US" smtClean="0"/>
-              <a:t>2025-06-04</a:t>
+              <a:t>2025-06-07</a:t>
             </a:fld>
             <a:endParaRPr lang="ko-KR" altLang="en-US"/>
           </a:p>
@@ -1141,7 +1141,7 @@
           <a:p>
             <a:fld id="{F3E3B444-461C-43DF-9895-EF8F91AA3F26}" type="datetimeFigureOut">
               <a:rPr lang="ko-KR" altLang="en-US" smtClean="0"/>
-              <a:t>2025-06-04</a:t>
+              <a:t>2025-06-07</a:t>
             </a:fld>
             <a:endParaRPr lang="ko-KR" altLang="en-US"/>
           </a:p>
@@ -1406,7 +1406,7 @@
           <a:p>
             <a:fld id="{F3E3B444-461C-43DF-9895-EF8F91AA3F26}" type="datetimeFigureOut">
               <a:rPr lang="ko-KR" altLang="en-US" smtClean="0"/>
-              <a:t>2025-06-04</a:t>
+              <a:t>2025-06-07</a:t>
             </a:fld>
             <a:endParaRPr lang="ko-KR" altLang="en-US"/>
           </a:p>
@@ -1818,7 +1818,7 @@
           <a:p>
             <a:fld id="{F3E3B444-461C-43DF-9895-EF8F91AA3F26}" type="datetimeFigureOut">
               <a:rPr lang="ko-KR" altLang="en-US" smtClean="0"/>
-              <a:t>2025-06-04</a:t>
+              <a:t>2025-06-07</a:t>
             </a:fld>
             <a:endParaRPr lang="ko-KR" altLang="en-US"/>
           </a:p>
@@ -1959,7 +1959,7 @@
           <a:p>
             <a:fld id="{F3E3B444-461C-43DF-9895-EF8F91AA3F26}" type="datetimeFigureOut">
               <a:rPr lang="ko-KR" altLang="en-US" smtClean="0"/>
-              <a:t>2025-06-04</a:t>
+              <a:t>2025-06-07</a:t>
             </a:fld>
             <a:endParaRPr lang="ko-KR" altLang="en-US"/>
           </a:p>
@@ -2072,7 +2072,7 @@
           <a:p>
             <a:fld id="{F3E3B444-461C-43DF-9895-EF8F91AA3F26}" type="datetimeFigureOut">
               <a:rPr lang="ko-KR" altLang="en-US" smtClean="0"/>
-              <a:t>2025-06-04</a:t>
+              <a:t>2025-06-07</a:t>
             </a:fld>
             <a:endParaRPr lang="ko-KR" altLang="en-US"/>
           </a:p>
@@ -2383,7 +2383,7 @@
           <a:p>
             <a:fld id="{F3E3B444-461C-43DF-9895-EF8F91AA3F26}" type="datetimeFigureOut">
               <a:rPr lang="ko-KR" altLang="en-US" smtClean="0"/>
-              <a:t>2025-06-04</a:t>
+              <a:t>2025-06-07</a:t>
             </a:fld>
             <a:endParaRPr lang="ko-KR" altLang="en-US"/>
           </a:p>
@@ -2671,7 +2671,7 @@
           <a:p>
             <a:fld id="{F3E3B444-461C-43DF-9895-EF8F91AA3F26}" type="datetimeFigureOut">
               <a:rPr lang="ko-KR" altLang="en-US" smtClean="0"/>
-              <a:t>2025-06-04</a:t>
+              <a:t>2025-06-07</a:t>
             </a:fld>
             <a:endParaRPr lang="ko-KR" altLang="en-US"/>
           </a:p>
@@ -2918,7 +2918,7 @@
           <a:p>
             <a:fld id="{F3E3B444-461C-43DF-9895-EF8F91AA3F26}" type="datetimeFigureOut">
               <a:rPr lang="ko-KR" altLang="en-US" smtClean="0"/>
-              <a:t>2025-06-04</a:t>
+              <a:t>2025-06-07</a:t>
             </a:fld>
             <a:endParaRPr lang="ko-KR" altLang="en-US"/>
           </a:p>
@@ -3337,6 +3337,78 @@
       </p:grpSpPr>
       <p:sp>
         <p:nvSpPr>
+          <p:cNvPr id="14" name="원형: 비어 있음 13">
+            <a:extLst>
+              <a:ext uri="{FF2B5EF4-FFF2-40B4-BE49-F238E27FC236}">
+                <a16:creationId xmlns:a16="http://schemas.microsoft.com/office/drawing/2014/main" id="{D1C9308F-D7EF-A1A7-BA40-F8484D3F4D08}"/>
+              </a:ext>
+            </a:extLst>
+          </p:cNvPr>
+          <p:cNvSpPr/>
+          <p:nvPr/>
+        </p:nvSpPr>
+        <p:spPr>
+          <a:xfrm>
+            <a:off x="1348630" y="2907638"/>
+            <a:ext cx="1800000" cy="1800000"/>
+          </a:xfrm>
+          <a:prstGeom prst="donut">
+            <a:avLst>
+              <a:gd name="adj" fmla="val 13886"/>
+            </a:avLst>
+          </a:prstGeom>
+          <a:gradFill>
+            <a:gsLst>
+              <a:gs pos="0">
+                <a:srgbClr val="FF0000"/>
+              </a:gs>
+              <a:gs pos="42000">
+                <a:srgbClr val="FFC000"/>
+              </a:gs>
+              <a:gs pos="76000">
+                <a:srgbClr val="92D050"/>
+              </a:gs>
+              <a:gs pos="100000">
+                <a:srgbClr val="00B050"/>
+              </a:gs>
+            </a:gsLst>
+            <a:lin ang="10200000" scaled="0"/>
+          </a:gradFill>
+          <a:ln>
+            <a:noFill/>
+          </a:ln>
+        </p:spPr>
+        <p:style>
+          <a:lnRef idx="2">
+            <a:schemeClr val="accent1">
+              <a:shade val="15000"/>
+            </a:schemeClr>
+          </a:lnRef>
+          <a:fillRef idx="1">
+            <a:schemeClr val="accent1"/>
+          </a:fillRef>
+          <a:effectRef idx="0">
+            <a:schemeClr val="accent1"/>
+          </a:effectRef>
+          <a:fontRef idx="minor">
+            <a:schemeClr val="lt1"/>
+          </a:fontRef>
+        </p:style>
+        <p:txBody>
+          <a:bodyPr rtlCol="0" anchor="ctr"/>
+          <a:lstStyle/>
+          <a:p>
+            <a:pPr algn="ctr"/>
+            <a:endParaRPr lang="ko-KR" altLang="en-US">
+              <a:solidFill>
+                <a:schemeClr val="tx1"/>
+              </a:solidFill>
+            </a:endParaRPr>
+          </a:p>
+        </p:txBody>
+      </p:sp>
+      <p:sp>
+        <p:nvSpPr>
           <p:cNvPr id="5" name="막힌 원호 4">
             <a:extLst>
               <a:ext uri="{FF2B5EF4-FFF2-40B4-BE49-F238E27FC236}">
@@ -4348,7 +4420,7 @@
         </p:nvSpPr>
         <p:spPr>
           <a:xfrm rot="1247646">
-            <a:off x="5655353" y="3358397"/>
+            <a:off x="5655353" y="3631933"/>
             <a:ext cx="1800000" cy="1800000"/>
           </a:xfrm>
           <a:prstGeom prst="blockArc">
@@ -4462,6 +4534,311 @@
         <p:spPr>
           <a:xfrm rot="-1800000" flipH="1">
             <a:off x="5172879" y="4289365"/>
+            <a:ext cx="2672541" cy="0"/>
+          </a:xfrm>
+          <a:prstGeom prst="line">
+            <a:avLst/>
+          </a:prstGeom>
+        </p:spPr>
+        <p:style>
+          <a:lnRef idx="2">
+            <a:schemeClr val="accent1"/>
+          </a:lnRef>
+          <a:fillRef idx="0">
+            <a:schemeClr val="accent1"/>
+          </a:fillRef>
+          <a:effectRef idx="1">
+            <a:schemeClr val="accent1"/>
+          </a:effectRef>
+          <a:fontRef idx="minor">
+            <a:schemeClr val="tx1"/>
+          </a:fontRef>
+        </p:style>
+      </p:cxnSp>
+      <p:grpSp>
+        <p:nvGrpSpPr>
+          <p:cNvPr id="4" name="그룹 3">
+            <a:extLst>
+              <a:ext uri="{FF2B5EF4-FFF2-40B4-BE49-F238E27FC236}">
+                <a16:creationId xmlns:a16="http://schemas.microsoft.com/office/drawing/2014/main" id="{56C225CC-FA52-30DD-828D-D4F163CE999A}"/>
+              </a:ext>
+            </a:extLst>
+          </p:cNvPr>
+          <p:cNvGrpSpPr/>
+          <p:nvPr/>
+        </p:nvGrpSpPr>
+        <p:grpSpPr>
+          <a:xfrm>
+            <a:off x="5232015" y="2363242"/>
+            <a:ext cx="1800001" cy="1800000"/>
+            <a:chOff x="1812762" y="2531379"/>
+            <a:chExt cx="1800001" cy="1800000"/>
+          </a:xfrm>
+        </p:grpSpPr>
+        <p:sp>
+          <p:nvSpPr>
+            <p:cNvPr id="10" name="막힌 원호 9">
+              <a:extLst>
+                <a:ext uri="{FF2B5EF4-FFF2-40B4-BE49-F238E27FC236}">
+                  <a16:creationId xmlns:a16="http://schemas.microsoft.com/office/drawing/2014/main" id="{BC945EE0-8BC1-50A2-96B0-269B36CDDB66}"/>
+                </a:ext>
+              </a:extLst>
+            </p:cNvPr>
+            <p:cNvSpPr/>
+            <p:nvPr/>
+          </p:nvSpPr>
+          <p:spPr>
+            <a:xfrm rot="1247646">
+              <a:off x="1812763" y="2531379"/>
+              <a:ext cx="1800000" cy="1800000"/>
+            </a:xfrm>
+            <a:prstGeom prst="blockArc">
+              <a:avLst>
+                <a:gd name="adj1" fmla="val 7814100"/>
+                <a:gd name="adj2" fmla="val 14990764"/>
+                <a:gd name="adj3" fmla="val 14138"/>
+              </a:avLst>
+            </a:prstGeom>
+            <a:solidFill>
+              <a:srgbClr val="FF0000">
+                <a:alpha val="10000"/>
+              </a:srgbClr>
+            </a:solidFill>
+            <a:ln>
+              <a:solidFill>
+                <a:srgbClr val="FF0000">
+                  <a:alpha val="50000"/>
+                </a:srgbClr>
+              </a:solidFill>
+            </a:ln>
+            <a:effectLst>
+              <a:glow rad="38100">
+                <a:srgbClr val="FF0000">
+                  <a:alpha val="20000"/>
+                </a:srgbClr>
+              </a:glow>
+            </a:effectLst>
+          </p:spPr>
+          <p:style>
+            <a:lnRef idx="2">
+              <a:schemeClr val="accent1">
+                <a:shade val="15000"/>
+              </a:schemeClr>
+            </a:lnRef>
+            <a:fillRef idx="1">
+              <a:schemeClr val="accent1"/>
+            </a:fillRef>
+            <a:effectRef idx="0">
+              <a:schemeClr val="accent1"/>
+            </a:effectRef>
+            <a:fontRef idx="minor">
+              <a:schemeClr val="lt1"/>
+            </a:fontRef>
+          </p:style>
+          <p:txBody>
+            <a:bodyPr rtlCol="0" anchor="ctr"/>
+            <a:lstStyle/>
+            <a:p>
+              <a:pPr algn="ctr"/>
+              <a:endParaRPr lang="ko-KR" altLang="en-US" dirty="0">
+                <a:solidFill>
+                  <a:schemeClr val="tx1"/>
+                </a:solidFill>
+              </a:endParaRPr>
+            </a:p>
+          </p:txBody>
+        </p:sp>
+        <p:sp>
+          <p:nvSpPr>
+            <p:cNvPr id="11" name="막힌 원호 10">
+              <a:extLst>
+                <a:ext uri="{FF2B5EF4-FFF2-40B4-BE49-F238E27FC236}">
+                  <a16:creationId xmlns:a16="http://schemas.microsoft.com/office/drawing/2014/main" id="{0338E282-E30B-8489-037D-5DFF2E12C1D8}"/>
+                </a:ext>
+              </a:extLst>
+            </p:cNvPr>
+            <p:cNvSpPr/>
+            <p:nvPr/>
+          </p:nvSpPr>
+          <p:spPr>
+            <a:xfrm rot="9240000">
+              <a:off x="1812762" y="2531379"/>
+              <a:ext cx="1800000" cy="1800000"/>
+            </a:xfrm>
+            <a:prstGeom prst="blockArc">
+              <a:avLst>
+                <a:gd name="adj1" fmla="val 10774825"/>
+                <a:gd name="adj2" fmla="val 21492135"/>
+                <a:gd name="adj3" fmla="val 13752"/>
+              </a:avLst>
+            </a:prstGeom>
+            <a:solidFill>
+              <a:schemeClr val="tx1">
+                <a:alpha val="0"/>
+              </a:schemeClr>
+            </a:solidFill>
+            <a:ln>
+              <a:noFill/>
+            </a:ln>
+          </p:spPr>
+          <p:style>
+            <a:lnRef idx="2">
+              <a:schemeClr val="accent1">
+                <a:shade val="15000"/>
+              </a:schemeClr>
+            </a:lnRef>
+            <a:fillRef idx="1">
+              <a:schemeClr val="accent1"/>
+            </a:fillRef>
+            <a:effectRef idx="0">
+              <a:schemeClr val="accent1"/>
+            </a:effectRef>
+            <a:fontRef idx="minor">
+              <a:schemeClr val="lt1"/>
+            </a:fontRef>
+          </p:style>
+          <p:txBody>
+            <a:bodyPr rtlCol="0" anchor="ctr"/>
+            <a:lstStyle/>
+            <a:p>
+              <a:pPr algn="ctr"/>
+              <a:endParaRPr lang="ko-KR" altLang="en-US" dirty="0">
+                <a:solidFill>
+                  <a:schemeClr val="tx1"/>
+                </a:solidFill>
+              </a:endParaRPr>
+            </a:p>
+          </p:txBody>
+        </p:sp>
+      </p:grpSp>
+      <p:sp>
+        <p:nvSpPr>
+          <p:cNvPr id="12" name="막힌 원호 11">
+            <a:extLst>
+              <a:ext uri="{FF2B5EF4-FFF2-40B4-BE49-F238E27FC236}">
+                <a16:creationId xmlns:a16="http://schemas.microsoft.com/office/drawing/2014/main" id="{1FF951C2-FB08-31CE-54E9-2E27B499073C}"/>
+              </a:ext>
+            </a:extLst>
+          </p:cNvPr>
+          <p:cNvSpPr/>
+          <p:nvPr/>
+        </p:nvSpPr>
+        <p:spPr>
+          <a:xfrm rot="1247646">
+            <a:off x="3257305" y="2663202"/>
+            <a:ext cx="1800000" cy="1800000"/>
+          </a:xfrm>
+          <a:prstGeom prst="blockArc">
+            <a:avLst>
+              <a:gd name="adj1" fmla="val 7701692"/>
+              <a:gd name="adj2" fmla="val 4184773"/>
+              <a:gd name="adj3" fmla="val 13918"/>
+            </a:avLst>
+          </a:prstGeom>
+          <a:solidFill>
+            <a:srgbClr val="92D050">
+              <a:alpha val="10000"/>
+            </a:srgbClr>
+          </a:solidFill>
+          <a:ln>
+            <a:solidFill>
+              <a:srgbClr val="92D050">
+                <a:alpha val="50000"/>
+              </a:srgbClr>
+            </a:solidFill>
+          </a:ln>
+          <a:effectLst>
+            <a:glow rad="38100">
+              <a:srgbClr val="0070C0">
+                <a:alpha val="20000"/>
+              </a:srgbClr>
+            </a:glow>
+          </a:effectLst>
+        </p:spPr>
+        <p:style>
+          <a:lnRef idx="2">
+            <a:schemeClr val="accent1">
+              <a:shade val="15000"/>
+            </a:schemeClr>
+          </a:lnRef>
+          <a:fillRef idx="1">
+            <a:schemeClr val="accent1"/>
+          </a:fillRef>
+          <a:effectRef idx="0">
+            <a:schemeClr val="accent1"/>
+          </a:effectRef>
+          <a:fontRef idx="minor">
+            <a:schemeClr val="lt1"/>
+          </a:fontRef>
+        </p:style>
+        <p:txBody>
+          <a:bodyPr rtlCol="0" anchor="ctr"/>
+          <a:lstStyle/>
+          <a:p>
+            <a:pPr algn="ctr"/>
+            <a:endParaRPr lang="ko-KR" altLang="en-US" dirty="0">
+              <a:solidFill>
+                <a:schemeClr val="tx1"/>
+              </a:solidFill>
+            </a:endParaRPr>
+          </a:p>
+        </p:txBody>
+      </p:sp>
+      <p:cxnSp>
+        <p:nvCxnSpPr>
+          <p:cNvPr id="18" name="직선 연결선 17">
+            <a:extLst>
+              <a:ext uri="{FF2B5EF4-FFF2-40B4-BE49-F238E27FC236}">
+                <a16:creationId xmlns:a16="http://schemas.microsoft.com/office/drawing/2014/main" id="{BBA8A41D-A08B-5050-6392-6612F6FD7CFC}"/>
+              </a:ext>
+            </a:extLst>
+          </p:cNvPr>
+          <p:cNvCxnSpPr>
+            <a:cxnSpLocks/>
+          </p:cNvCxnSpPr>
+          <p:nvPr/>
+        </p:nvCxnSpPr>
+        <p:spPr>
+          <a:xfrm rot="-1800000" flipH="1">
+            <a:off x="1025156" y="3709300"/>
+            <a:ext cx="2672541" cy="0"/>
+          </a:xfrm>
+          <a:prstGeom prst="line">
+            <a:avLst/>
+          </a:prstGeom>
+        </p:spPr>
+        <p:style>
+          <a:lnRef idx="2">
+            <a:schemeClr val="accent1"/>
+          </a:lnRef>
+          <a:fillRef idx="0">
+            <a:schemeClr val="accent1"/>
+          </a:fillRef>
+          <a:effectRef idx="1">
+            <a:schemeClr val="accent1"/>
+          </a:effectRef>
+          <a:fontRef idx="minor">
+            <a:schemeClr val="tx1"/>
+          </a:fontRef>
+        </p:style>
+      </p:cxnSp>
+      <p:cxnSp>
+        <p:nvCxnSpPr>
+          <p:cNvPr id="20" name="직선 연결선 19">
+            <a:extLst>
+              <a:ext uri="{FF2B5EF4-FFF2-40B4-BE49-F238E27FC236}">
+                <a16:creationId xmlns:a16="http://schemas.microsoft.com/office/drawing/2014/main" id="{91733B4F-C606-683C-6742-4DCDDA176EB5}"/>
+              </a:ext>
+            </a:extLst>
+          </p:cNvPr>
+          <p:cNvCxnSpPr>
+            <a:cxnSpLocks/>
+          </p:cNvCxnSpPr>
+          <p:nvPr/>
+        </p:nvCxnSpPr>
+        <p:spPr>
+          <a:xfrm rot="5400000" flipH="1">
+            <a:off x="912358" y="3930904"/>
             <a:ext cx="2672541" cy="0"/>
           </a:xfrm>
           <a:prstGeom prst="line">

--- a/RawImages/imagePPT.pptx
+++ b/RawImages/imagePPT.pptx
@@ -262,7 +262,7 @@
           <a:p>
             <a:fld id="{F3E3B444-461C-43DF-9895-EF8F91AA3F26}" type="datetimeFigureOut">
               <a:rPr lang="ko-KR" altLang="en-US" smtClean="0"/>
-              <a:t>2025-06-07</a:t>
+              <a:t>2025-06-15</a:t>
             </a:fld>
             <a:endParaRPr lang="ko-KR" altLang="en-US"/>
           </a:p>
@@ -460,7 +460,7 @@
           <a:p>
             <a:fld id="{F3E3B444-461C-43DF-9895-EF8F91AA3F26}" type="datetimeFigureOut">
               <a:rPr lang="ko-KR" altLang="en-US" smtClean="0"/>
-              <a:t>2025-06-07</a:t>
+              <a:t>2025-06-15</a:t>
             </a:fld>
             <a:endParaRPr lang="ko-KR" altLang="en-US"/>
           </a:p>
@@ -668,7 +668,7 @@
           <a:p>
             <a:fld id="{F3E3B444-461C-43DF-9895-EF8F91AA3F26}" type="datetimeFigureOut">
               <a:rPr lang="ko-KR" altLang="en-US" smtClean="0"/>
-              <a:t>2025-06-07</a:t>
+              <a:t>2025-06-15</a:t>
             </a:fld>
             <a:endParaRPr lang="ko-KR" altLang="en-US"/>
           </a:p>
@@ -866,7 +866,7 @@
           <a:p>
             <a:fld id="{F3E3B444-461C-43DF-9895-EF8F91AA3F26}" type="datetimeFigureOut">
               <a:rPr lang="ko-KR" altLang="en-US" smtClean="0"/>
-              <a:t>2025-06-07</a:t>
+              <a:t>2025-06-15</a:t>
             </a:fld>
             <a:endParaRPr lang="ko-KR" altLang="en-US"/>
           </a:p>
@@ -1141,7 +1141,7 @@
           <a:p>
             <a:fld id="{F3E3B444-461C-43DF-9895-EF8F91AA3F26}" type="datetimeFigureOut">
               <a:rPr lang="ko-KR" altLang="en-US" smtClean="0"/>
-              <a:t>2025-06-07</a:t>
+              <a:t>2025-06-15</a:t>
             </a:fld>
             <a:endParaRPr lang="ko-KR" altLang="en-US"/>
           </a:p>
@@ -1406,7 +1406,7 @@
           <a:p>
             <a:fld id="{F3E3B444-461C-43DF-9895-EF8F91AA3F26}" type="datetimeFigureOut">
               <a:rPr lang="ko-KR" altLang="en-US" smtClean="0"/>
-              <a:t>2025-06-07</a:t>
+              <a:t>2025-06-15</a:t>
             </a:fld>
             <a:endParaRPr lang="ko-KR" altLang="en-US"/>
           </a:p>
@@ -1818,7 +1818,7 @@
           <a:p>
             <a:fld id="{F3E3B444-461C-43DF-9895-EF8F91AA3F26}" type="datetimeFigureOut">
               <a:rPr lang="ko-KR" altLang="en-US" smtClean="0"/>
-              <a:t>2025-06-07</a:t>
+              <a:t>2025-06-15</a:t>
             </a:fld>
             <a:endParaRPr lang="ko-KR" altLang="en-US"/>
           </a:p>
@@ -1959,7 +1959,7 @@
           <a:p>
             <a:fld id="{F3E3B444-461C-43DF-9895-EF8F91AA3F26}" type="datetimeFigureOut">
               <a:rPr lang="ko-KR" altLang="en-US" smtClean="0"/>
-              <a:t>2025-06-07</a:t>
+              <a:t>2025-06-15</a:t>
             </a:fld>
             <a:endParaRPr lang="ko-KR" altLang="en-US"/>
           </a:p>
@@ -2072,7 +2072,7 @@
           <a:p>
             <a:fld id="{F3E3B444-461C-43DF-9895-EF8F91AA3F26}" type="datetimeFigureOut">
               <a:rPr lang="ko-KR" altLang="en-US" smtClean="0"/>
-              <a:t>2025-06-07</a:t>
+              <a:t>2025-06-15</a:t>
             </a:fld>
             <a:endParaRPr lang="ko-KR" altLang="en-US"/>
           </a:p>
@@ -2383,7 +2383,7 @@
           <a:p>
             <a:fld id="{F3E3B444-461C-43DF-9895-EF8F91AA3F26}" type="datetimeFigureOut">
               <a:rPr lang="ko-KR" altLang="en-US" smtClean="0"/>
-              <a:t>2025-06-07</a:t>
+              <a:t>2025-06-15</a:t>
             </a:fld>
             <a:endParaRPr lang="ko-KR" altLang="en-US"/>
           </a:p>
@@ -2671,7 +2671,7 @@
           <a:p>
             <a:fld id="{F3E3B444-461C-43DF-9895-EF8F91AA3F26}" type="datetimeFigureOut">
               <a:rPr lang="ko-KR" altLang="en-US" smtClean="0"/>
-              <a:t>2025-06-07</a:t>
+              <a:t>2025-06-15</a:t>
             </a:fld>
             <a:endParaRPr lang="ko-KR" altLang="en-US"/>
           </a:p>
@@ -2918,7 +2918,7 @@
           <a:p>
             <a:fld id="{F3E3B444-461C-43DF-9895-EF8F91AA3F26}" type="datetimeFigureOut">
               <a:rPr lang="ko-KR" altLang="en-US" smtClean="0"/>
-              <a:t>2025-06-07</a:t>
+              <a:t>2025-06-15</a:t>
             </a:fld>
             <a:endParaRPr lang="ko-KR" altLang="en-US"/>
           </a:p>
@@ -5490,6 +5490,58 @@
           </a:prstGeom>
           <a:solidFill>
             <a:srgbClr val="FFFF00"/>
+          </a:solidFill>
+          <a:ln>
+            <a:noFill/>
+          </a:ln>
+        </p:spPr>
+        <p:style>
+          <a:lnRef idx="2">
+            <a:schemeClr val="accent1">
+              <a:shade val="15000"/>
+            </a:schemeClr>
+          </a:lnRef>
+          <a:fillRef idx="1">
+            <a:schemeClr val="accent1"/>
+          </a:fillRef>
+          <a:effectRef idx="0">
+            <a:schemeClr val="accent1"/>
+          </a:effectRef>
+          <a:fontRef idx="minor">
+            <a:schemeClr val="lt1"/>
+          </a:fontRef>
+        </p:style>
+        <p:txBody>
+          <a:bodyPr rtlCol="0" anchor="ctr"/>
+          <a:lstStyle/>
+          <a:p>
+            <a:pPr algn="ctr"/>
+            <a:endParaRPr lang="ko-KR" altLang="en-US"/>
+          </a:p>
+        </p:txBody>
+      </p:sp>
+      <p:sp>
+        <p:nvSpPr>
+          <p:cNvPr id="2" name="직사각형 1">
+            <a:extLst>
+              <a:ext uri="{FF2B5EF4-FFF2-40B4-BE49-F238E27FC236}">
+                <a16:creationId xmlns:a16="http://schemas.microsoft.com/office/drawing/2014/main" id="{433BFDC5-DCE6-1019-E005-D20BE59A0BDC}"/>
+              </a:ext>
+            </a:extLst>
+          </p:cNvPr>
+          <p:cNvSpPr/>
+          <p:nvPr/>
+        </p:nvSpPr>
+        <p:spPr>
+          <a:xfrm>
+            <a:off x="2466109" y="738909"/>
+            <a:ext cx="3269673" cy="64655"/>
+          </a:xfrm>
+          <a:prstGeom prst="rect">
+            <a:avLst/>
+          </a:prstGeom>
+          <a:solidFill>
+            <a:schemeClr val="bg1"/>
           </a:solidFill>
           <a:ln>
             <a:noFill/>
